--- a/ppt/IoT17-ESP32.pptx
+++ b/ppt/IoT17-ESP32.pptx
@@ -5,10 +5,10 @@
     <p:sldMasterId id="2147483653" r:id="rId1"/>
   </p:sldMasterIdLst>
   <p:notesMasterIdLst>
-    <p:notesMasterId r:id="rId19"/>
+    <p:notesMasterId r:id="rId22"/>
   </p:notesMasterIdLst>
   <p:handoutMasterIdLst>
-    <p:handoutMasterId r:id="rId20"/>
+    <p:handoutMasterId r:id="rId23"/>
   </p:handoutMasterIdLst>
   <p:sldIdLst>
     <p:sldId id="264" r:id="rId2"/>
@@ -28,6 +28,9 @@
     <p:sldId id="289" r:id="rId16"/>
     <p:sldId id="265" r:id="rId17"/>
     <p:sldId id="276" r:id="rId18"/>
+    <p:sldId id="291" r:id="rId19"/>
+    <p:sldId id="292" r:id="rId20"/>
+    <p:sldId id="290" r:id="rId21"/>
   </p:sldIdLst>
   <p:sldSz cx="9144000" cy="6858000" type="screen4x3"/>
   <p:notesSz cx="6648450" cy="9782175"/>
@@ -4720,6 +4723,368 @@
 </p:sld>
 </file>
 
+<file path=ppt/slides/slide18.xml><?xml version="1.0" encoding="utf-8"?>
+<p:sld xmlns:a="http://schemas.openxmlformats.org/drawingml/2006/main" xmlns:r="http://schemas.openxmlformats.org/officeDocument/2006/relationships" xmlns:p="http://schemas.openxmlformats.org/presentationml/2006/main">
+  <p:cSld>
+    <p:spTree>
+      <p:nvGrpSpPr>
+        <p:cNvPr id="1" name=""/>
+        <p:cNvGrpSpPr/>
+        <p:nvPr/>
+      </p:nvGrpSpPr>
+      <p:grpSpPr>
+        <a:xfrm>
+          <a:off x="0" y="0"/>
+          <a:ext cx="0" cy="0"/>
+          <a:chOff x="0" y="0"/>
+          <a:chExt cx="0" cy="0"/>
+        </a:xfrm>
+      </p:grpSpPr>
+      <p:sp>
+        <p:nvSpPr>
+          <p:cNvPr id="2" name="Titre 1">
+            <a:extLst>
+              <a:ext uri="{FF2B5EF4-FFF2-40B4-BE49-F238E27FC236}">
+                <a16:creationId xmlns:a16="http://schemas.microsoft.com/office/drawing/2014/main" id="{3E903FFC-CB90-5213-9085-2F08AB02C474}"/>
+              </a:ext>
+            </a:extLst>
+          </p:cNvPr>
+          <p:cNvSpPr>
+            <a:spLocks noGrp="1"/>
+          </p:cNvSpPr>
+          <p:nvPr>
+            <p:ph type="title"/>
+          </p:nvPr>
+        </p:nvSpPr>
+        <p:spPr/>
+        <p:txBody>
+          <a:bodyPr/>
+          <a:lstStyle/>
+          <a:p>
+            <a:r>
+              <a:rPr lang="fr-FR" dirty="0" err="1"/>
+              <a:t>Bread</a:t>
+            </a:r>
+            <a:r>
+              <a:rPr lang="fr-FR" dirty="0"/>
+              <a:t> </a:t>
+            </a:r>
+            <a:r>
+              <a:rPr lang="fr-FR" dirty="0" err="1"/>
+              <a:t>Board</a:t>
+            </a:r>
+            <a:endParaRPr lang="fr-FR" dirty="0"/>
+          </a:p>
+        </p:txBody>
+      </p:sp>
+      <p:sp>
+        <p:nvSpPr>
+          <p:cNvPr id="3" name="Espace réservé du contenu 2">
+            <a:extLst>
+              <a:ext uri="{FF2B5EF4-FFF2-40B4-BE49-F238E27FC236}">
+                <a16:creationId xmlns:a16="http://schemas.microsoft.com/office/drawing/2014/main" id="{225445D6-2FAD-E126-EA73-7DDEEB6C021A}"/>
+              </a:ext>
+            </a:extLst>
+          </p:cNvPr>
+          <p:cNvSpPr>
+            <a:spLocks noGrp="1"/>
+          </p:cNvSpPr>
+          <p:nvPr>
+            <p:ph idx="1"/>
+          </p:nvPr>
+        </p:nvSpPr>
+        <p:spPr/>
+        <p:txBody>
+          <a:bodyPr/>
+          <a:lstStyle/>
+          <a:p>
+            <a:endParaRPr lang="fr-FR" dirty="0"/>
+          </a:p>
+          <a:p>
+            <a:endParaRPr lang="fr-FR" dirty="0"/>
+          </a:p>
+          <a:p>
+            <a:endParaRPr lang="fr-FR" dirty="0"/>
+          </a:p>
+          <a:p>
+            <a:endParaRPr lang="fr-FR" dirty="0"/>
+          </a:p>
+          <a:p>
+            <a:pPr marL="0" indent="0">
+              <a:buNone/>
+            </a:pPr>
+            <a:endParaRPr lang="fr-FR" dirty="0"/>
+          </a:p>
+        </p:txBody>
+      </p:sp>
+      <p:pic>
+        <p:nvPicPr>
+          <p:cNvPr id="7" name="Image 6">
+            <a:extLst>
+              <a:ext uri="{FF2B5EF4-FFF2-40B4-BE49-F238E27FC236}">
+                <a16:creationId xmlns:a16="http://schemas.microsoft.com/office/drawing/2014/main" id="{003467BC-A008-CD54-71E4-8E0F97C603A2}"/>
+              </a:ext>
+            </a:extLst>
+          </p:cNvPr>
+          <p:cNvPicPr>
+            <a:picLocks noChangeAspect="1"/>
+          </p:cNvPicPr>
+          <p:nvPr/>
+        </p:nvPicPr>
+        <p:blipFill>
+          <a:blip r:embed="rId2"/>
+          <a:stretch>
+            <a:fillRect/>
+          </a:stretch>
+        </p:blipFill>
+        <p:spPr>
+          <a:xfrm>
+            <a:off x="608958" y="1556792"/>
+            <a:ext cx="7926083" cy="4278354"/>
+          </a:xfrm>
+          <a:prstGeom prst="rect">
+            <a:avLst/>
+          </a:prstGeom>
+        </p:spPr>
+      </p:pic>
+    </p:spTree>
+    <p:extLst>
+      <p:ext uri="{BB962C8B-B14F-4D97-AF65-F5344CB8AC3E}">
+        <p14:creationId xmlns:p14="http://schemas.microsoft.com/office/powerpoint/2010/main" val="1795508536"/>
+      </p:ext>
+    </p:extLst>
+  </p:cSld>
+  <p:clrMapOvr>
+    <a:masterClrMapping/>
+  </p:clrMapOvr>
+</p:sld>
+</file>
+
+<file path=ppt/slides/slide19.xml><?xml version="1.0" encoding="utf-8"?>
+<p:sld xmlns:a="http://schemas.openxmlformats.org/drawingml/2006/main" xmlns:r="http://schemas.openxmlformats.org/officeDocument/2006/relationships" xmlns:p="http://schemas.openxmlformats.org/presentationml/2006/main">
+  <p:cSld>
+    <p:spTree>
+      <p:nvGrpSpPr>
+        <p:cNvPr id="1" name=""/>
+        <p:cNvGrpSpPr/>
+        <p:nvPr/>
+      </p:nvGrpSpPr>
+      <p:grpSpPr>
+        <a:xfrm>
+          <a:off x="0" y="0"/>
+          <a:ext cx="0" cy="0"/>
+          <a:chOff x="0" y="0"/>
+          <a:chExt cx="0" cy="0"/>
+        </a:xfrm>
+      </p:grpSpPr>
+      <p:sp>
+        <p:nvSpPr>
+          <p:cNvPr id="2" name="Titre 1">
+            <a:extLst>
+              <a:ext uri="{FF2B5EF4-FFF2-40B4-BE49-F238E27FC236}">
+                <a16:creationId xmlns:a16="http://schemas.microsoft.com/office/drawing/2014/main" id="{98B11CAE-2A61-3B49-829C-40FCCA4785C1}"/>
+              </a:ext>
+            </a:extLst>
+          </p:cNvPr>
+          <p:cNvSpPr>
+            <a:spLocks noGrp="1"/>
+          </p:cNvSpPr>
+          <p:nvPr>
+            <p:ph type="title"/>
+          </p:nvPr>
+        </p:nvSpPr>
+        <p:spPr/>
+        <p:txBody>
+          <a:bodyPr/>
+          <a:lstStyle/>
+          <a:p>
+            <a:r>
+              <a:rPr lang="fr-FR" dirty="0" err="1"/>
+              <a:t>TinkerCard</a:t>
+            </a:r>
+            <a:endParaRPr lang="fr-FR" dirty="0"/>
+          </a:p>
+        </p:txBody>
+      </p:sp>
+      <p:sp>
+        <p:nvSpPr>
+          <p:cNvPr id="3" name="Espace réservé du contenu 2">
+            <a:extLst>
+              <a:ext uri="{FF2B5EF4-FFF2-40B4-BE49-F238E27FC236}">
+                <a16:creationId xmlns:a16="http://schemas.microsoft.com/office/drawing/2014/main" id="{5B36D472-A484-9FE8-5CE7-5262504F4C4E}"/>
+              </a:ext>
+            </a:extLst>
+          </p:cNvPr>
+          <p:cNvSpPr>
+            <a:spLocks noGrp="1"/>
+          </p:cNvSpPr>
+          <p:nvPr>
+            <p:ph idx="1"/>
+          </p:nvPr>
+        </p:nvSpPr>
+        <p:spPr/>
+        <p:txBody>
+          <a:bodyPr/>
+          <a:lstStyle/>
+          <a:p>
+            <a:r>
+              <a:rPr lang="fr-FR" dirty="0">
+                <a:hlinkClick r:id="rId2"/>
+              </a:rPr>
+              <a:t>https://www.tinkercad.com</a:t>
+            </a:r>
+            <a:endParaRPr lang="fr-FR" dirty="0"/>
+          </a:p>
+          <a:p>
+            <a:r>
+              <a:rPr lang="fr-FR" dirty="0"/>
+              <a:t>Avec les boutons suivants vous pouvez</a:t>
+            </a:r>
+          </a:p>
+          <a:p>
+            <a:pPr lvl="1"/>
+            <a:r>
+              <a:rPr lang="fr-FR" dirty="0"/>
+              <a:t>La liste des composants (BOM – Bill of </a:t>
+            </a:r>
+            <a:r>
+              <a:rPr lang="fr-FR" dirty="0" err="1"/>
+              <a:t>Material</a:t>
+            </a:r>
+            <a:r>
+              <a:rPr lang="fr-FR" dirty="0"/>
+              <a:t>)</a:t>
+            </a:r>
+          </a:p>
+          <a:p>
+            <a:pPr lvl="1"/>
+            <a:r>
+              <a:rPr lang="fr-FR" dirty="0"/>
+              <a:t>Le schéma électrique</a:t>
+            </a:r>
+          </a:p>
+          <a:p>
+            <a:pPr lvl="1"/>
+            <a:r>
+              <a:rPr lang="fr-FR" dirty="0"/>
+              <a:t>Envoyer vers Fusion : permet de créer le prototype de PCB</a:t>
+            </a:r>
+          </a:p>
+          <a:p>
+            <a:pPr lvl="1"/>
+            <a:endParaRPr lang="fr-FR" dirty="0"/>
+          </a:p>
+          <a:p>
+            <a:endParaRPr lang="fr-FR" dirty="0"/>
+          </a:p>
+          <a:p>
+            <a:endParaRPr lang="fr-FR" dirty="0"/>
+          </a:p>
+        </p:txBody>
+      </p:sp>
+      <p:pic>
+        <p:nvPicPr>
+          <p:cNvPr id="7" name="Image 6">
+            <a:extLst>
+              <a:ext uri="{FF2B5EF4-FFF2-40B4-BE49-F238E27FC236}">
+                <a16:creationId xmlns:a16="http://schemas.microsoft.com/office/drawing/2014/main" id="{18F79BBD-1665-438C-4327-74E1F350A502}"/>
+              </a:ext>
+            </a:extLst>
+          </p:cNvPr>
+          <p:cNvPicPr>
+            <a:picLocks noChangeAspect="1"/>
+          </p:cNvPicPr>
+          <p:nvPr/>
+        </p:nvPicPr>
+        <p:blipFill>
+          <a:blip r:embed="rId3"/>
+          <a:stretch>
+            <a:fillRect/>
+          </a:stretch>
+        </p:blipFill>
+        <p:spPr>
+          <a:xfrm>
+            <a:off x="6325822" y="317972"/>
+            <a:ext cx="2619741" cy="533474"/>
+          </a:xfrm>
+          <a:prstGeom prst="rect">
+            <a:avLst/>
+          </a:prstGeom>
+        </p:spPr>
+      </p:pic>
+      <p:pic>
+        <p:nvPicPr>
+          <p:cNvPr id="15" name="Image 14">
+            <a:extLst>
+              <a:ext uri="{FF2B5EF4-FFF2-40B4-BE49-F238E27FC236}">
+                <a16:creationId xmlns:a16="http://schemas.microsoft.com/office/drawing/2014/main" id="{BAEF3546-A63C-BB5D-7AB7-11DA97403BBC}"/>
+              </a:ext>
+            </a:extLst>
+          </p:cNvPr>
+          <p:cNvPicPr>
+            <a:picLocks noChangeAspect="1"/>
+          </p:cNvPicPr>
+          <p:nvPr/>
+        </p:nvPicPr>
+        <p:blipFill>
+          <a:blip r:embed="rId4"/>
+          <a:stretch>
+            <a:fillRect/>
+          </a:stretch>
+        </p:blipFill>
+        <p:spPr>
+          <a:xfrm>
+            <a:off x="7092280" y="1916832"/>
+            <a:ext cx="1629002" cy="514422"/>
+          </a:xfrm>
+          <a:prstGeom prst="rect">
+            <a:avLst/>
+          </a:prstGeom>
+        </p:spPr>
+      </p:pic>
+      <p:pic>
+        <p:nvPicPr>
+          <p:cNvPr id="5" name="Image 4">
+            <a:extLst>
+              <a:ext uri="{FF2B5EF4-FFF2-40B4-BE49-F238E27FC236}">
+                <a16:creationId xmlns:a16="http://schemas.microsoft.com/office/drawing/2014/main" id="{2DEF39AE-C828-06C6-E5D2-516AA6401BD7}"/>
+              </a:ext>
+            </a:extLst>
+          </p:cNvPr>
+          <p:cNvPicPr>
+            <a:picLocks noChangeAspect="1"/>
+          </p:cNvPicPr>
+          <p:nvPr/>
+        </p:nvPicPr>
+        <p:blipFill>
+          <a:blip r:embed="rId5"/>
+          <a:stretch>
+            <a:fillRect/>
+          </a:stretch>
+        </p:blipFill>
+        <p:spPr>
+          <a:xfrm>
+            <a:off x="1213655" y="4064792"/>
+            <a:ext cx="7452320" cy="2815723"/>
+          </a:xfrm>
+          <a:prstGeom prst="rect">
+            <a:avLst/>
+          </a:prstGeom>
+        </p:spPr>
+      </p:pic>
+    </p:spTree>
+    <p:extLst>
+      <p:ext uri="{BB962C8B-B14F-4D97-AF65-F5344CB8AC3E}">
+        <p14:creationId xmlns:p14="http://schemas.microsoft.com/office/powerpoint/2010/main" val="3009066134"/>
+      </p:ext>
+    </p:extLst>
+  </p:cSld>
+  <p:clrMapOvr>
+    <a:masterClrMapping/>
+  </p:clrMapOvr>
+</p:sld>
+</file>
+
 <file path=ppt/slides/slide2.xml><?xml version="1.0" encoding="utf-8"?>
 <p:sld xmlns:a="http://schemas.openxmlformats.org/drawingml/2006/main" xmlns:r="http://schemas.openxmlformats.org/officeDocument/2006/relationships" xmlns:p="http://schemas.openxmlformats.org/presentationml/2006/main">
   <p:cSld>
@@ -4895,6 +5260,149 @@
     <p:extLst>
       <p:ext uri="{BB962C8B-B14F-4D97-AF65-F5344CB8AC3E}">
         <p14:creationId xmlns:p14="http://schemas.microsoft.com/office/powerpoint/2010/main" val="3254821064"/>
+      </p:ext>
+    </p:extLst>
+  </p:cSld>
+  <p:clrMapOvr>
+    <a:masterClrMapping/>
+  </p:clrMapOvr>
+</p:sld>
+</file>
+
+<file path=ppt/slides/slide20.xml><?xml version="1.0" encoding="utf-8"?>
+<p:sld xmlns:a="http://schemas.openxmlformats.org/drawingml/2006/main" xmlns:r="http://schemas.openxmlformats.org/officeDocument/2006/relationships" xmlns:p="http://schemas.openxmlformats.org/presentationml/2006/main">
+  <p:cSld>
+    <p:spTree>
+      <p:nvGrpSpPr>
+        <p:cNvPr id="1" name=""/>
+        <p:cNvGrpSpPr/>
+        <p:nvPr/>
+      </p:nvGrpSpPr>
+      <p:grpSpPr>
+        <a:xfrm>
+          <a:off x="0" y="0"/>
+          <a:ext cx="0" cy="0"/>
+          <a:chOff x="0" y="0"/>
+          <a:chExt cx="0" cy="0"/>
+        </a:xfrm>
+      </p:grpSpPr>
+      <p:sp>
+        <p:nvSpPr>
+          <p:cNvPr id="2" name="Titre 1">
+            <a:extLst>
+              <a:ext uri="{FF2B5EF4-FFF2-40B4-BE49-F238E27FC236}">
+                <a16:creationId xmlns:a16="http://schemas.microsoft.com/office/drawing/2014/main" id="{A91CD0F0-78E8-2239-1DF8-7245077B1C62}"/>
+              </a:ext>
+            </a:extLst>
+          </p:cNvPr>
+          <p:cNvSpPr>
+            <a:spLocks noGrp="1"/>
+          </p:cNvSpPr>
+          <p:nvPr>
+            <p:ph type="title"/>
+          </p:nvPr>
+        </p:nvSpPr>
+        <p:spPr/>
+        <p:txBody>
+          <a:bodyPr/>
+          <a:lstStyle/>
+          <a:p>
+            <a:r>
+              <a:rPr lang="fr-FR" dirty="0"/>
+              <a:t>Industrialisation</a:t>
+            </a:r>
+          </a:p>
+        </p:txBody>
+      </p:sp>
+      <p:sp>
+        <p:nvSpPr>
+          <p:cNvPr id="3" name="Espace réservé du contenu 2">
+            <a:extLst>
+              <a:ext uri="{FF2B5EF4-FFF2-40B4-BE49-F238E27FC236}">
+                <a16:creationId xmlns:a16="http://schemas.microsoft.com/office/drawing/2014/main" id="{0F3837FF-182B-C092-741B-DCB40FF0CB42}"/>
+              </a:ext>
+            </a:extLst>
+          </p:cNvPr>
+          <p:cNvSpPr>
+            <a:spLocks noGrp="1"/>
+          </p:cNvSpPr>
+          <p:nvPr>
+            <p:ph idx="1"/>
+          </p:nvPr>
+        </p:nvSpPr>
+        <p:spPr/>
+        <p:txBody>
+          <a:bodyPr/>
+          <a:lstStyle/>
+          <a:p>
+            <a:endParaRPr lang="fr-FR" dirty="0"/>
+          </a:p>
+        </p:txBody>
+      </p:sp>
+      <p:pic>
+        <p:nvPicPr>
+          <p:cNvPr id="5" name="Image 4">
+            <a:extLst>
+              <a:ext uri="{FF2B5EF4-FFF2-40B4-BE49-F238E27FC236}">
+                <a16:creationId xmlns:a16="http://schemas.microsoft.com/office/drawing/2014/main" id="{9D86BE4C-A787-528F-3818-FC4E5DF8035C}"/>
+              </a:ext>
+            </a:extLst>
+          </p:cNvPr>
+          <p:cNvPicPr>
+            <a:picLocks noChangeAspect="1"/>
+          </p:cNvPicPr>
+          <p:nvPr/>
+        </p:nvPicPr>
+        <p:blipFill>
+          <a:blip r:embed="rId2"/>
+          <a:stretch>
+            <a:fillRect/>
+          </a:stretch>
+        </p:blipFill>
+        <p:spPr>
+          <a:xfrm>
+            <a:off x="4829574" y="1710922"/>
+            <a:ext cx="3553321" cy="3905795"/>
+          </a:xfrm>
+          <a:prstGeom prst="rect">
+            <a:avLst/>
+          </a:prstGeom>
+        </p:spPr>
+      </p:pic>
+      <p:pic>
+        <p:nvPicPr>
+          <p:cNvPr id="7" name="Image 6">
+            <a:extLst>
+              <a:ext uri="{FF2B5EF4-FFF2-40B4-BE49-F238E27FC236}">
+                <a16:creationId xmlns:a16="http://schemas.microsoft.com/office/drawing/2014/main" id="{B8DE2B5D-04C0-BEA2-8B87-8DFB9E91C232}"/>
+              </a:ext>
+            </a:extLst>
+          </p:cNvPr>
+          <p:cNvPicPr>
+            <a:picLocks noChangeAspect="1"/>
+          </p:cNvPicPr>
+          <p:nvPr/>
+        </p:nvPicPr>
+        <p:blipFill>
+          <a:blip r:embed="rId3"/>
+          <a:stretch>
+            <a:fillRect/>
+          </a:stretch>
+        </p:blipFill>
+        <p:spPr>
+          <a:xfrm>
+            <a:off x="0" y="2060848"/>
+            <a:ext cx="4673726" cy="3205945"/>
+          </a:xfrm>
+          <a:prstGeom prst="rect">
+            <a:avLst/>
+          </a:prstGeom>
+        </p:spPr>
+      </p:pic>
+    </p:spTree>
+    <p:extLst>
+      <p:ext uri="{BB962C8B-B14F-4D97-AF65-F5344CB8AC3E}">
+        <p14:creationId xmlns:p14="http://schemas.microsoft.com/office/powerpoint/2010/main" val="1828250498"/>
       </p:ext>
     </p:extLst>
   </p:cSld>

--- a/ppt/IoT17-ESP32.pptx
+++ b/ppt/IoT17-ESP32.pptx
@@ -24,8 +24,8 @@
     <p:sldId id="266" r:id="rId12"/>
     <p:sldId id="273" r:id="rId13"/>
     <p:sldId id="274" r:id="rId14"/>
-    <p:sldId id="275" r:id="rId15"/>
-    <p:sldId id="289" r:id="rId16"/>
+    <p:sldId id="289" r:id="rId15"/>
+    <p:sldId id="293" r:id="rId16"/>
     <p:sldId id="265" r:id="rId17"/>
     <p:sldId id="276" r:id="rId18"/>
     <p:sldId id="291" r:id="rId19"/>
@@ -4167,7 +4167,7 @@
           <a:p>
             <a:r>
               <a:rPr lang="fr-FR" dirty="0"/>
-              <a:t>PWM</a:t>
+              <a:t>PWM &amp; I2C</a:t>
             </a:r>
           </a:p>
         </p:txBody>
@@ -4198,6 +4198,30 @@
               <a:t>Tous les pins disponibles en output peuvent être mis en PWM</a:t>
             </a:r>
           </a:p>
+          <a:p>
+            <a:r>
+              <a:rPr lang="it-IT" dirty="0"/>
+              <a:t>I2C</a:t>
+            </a:r>
+          </a:p>
+          <a:p>
+            <a:pPr lvl="1"/>
+            <a:r>
+              <a:rPr lang="it-IT" dirty="0"/>
+              <a:t>GPIO 21 (SDA)</a:t>
+            </a:r>
+          </a:p>
+          <a:p>
+            <a:pPr lvl="1"/>
+            <a:r>
+              <a:rPr lang="it-IT" dirty="0"/>
+              <a:t>GPIO 22 (SCL)</a:t>
+            </a:r>
+            <a:endParaRPr lang="fr-FR" dirty="0"/>
+          </a:p>
+          <a:p>
+            <a:endParaRPr lang="fr-FR" dirty="0"/>
+          </a:p>
         </p:txBody>
       </p:sp>
     </p:spTree>
@@ -4214,99 +4238,6 @@
 </file>
 
 <file path=ppt/slides/slide14.xml><?xml version="1.0" encoding="utf-8"?>
-<p:sld xmlns:a="http://schemas.openxmlformats.org/drawingml/2006/main" xmlns:r="http://schemas.openxmlformats.org/officeDocument/2006/relationships" xmlns:p="http://schemas.openxmlformats.org/presentationml/2006/main">
-  <p:cSld>
-    <p:spTree>
-      <p:nvGrpSpPr>
-        <p:cNvPr id="1" name=""/>
-        <p:cNvGrpSpPr/>
-        <p:nvPr/>
-      </p:nvGrpSpPr>
-      <p:grpSpPr>
-        <a:xfrm>
-          <a:off x="0" y="0"/>
-          <a:ext cx="0" cy="0"/>
-          <a:chOff x="0" y="0"/>
-          <a:chExt cx="0" cy="0"/>
-        </a:xfrm>
-      </p:grpSpPr>
-      <p:sp>
-        <p:nvSpPr>
-          <p:cNvPr id="2" name="Titre 1">
-            <a:extLst>
-              <a:ext uri="{FF2B5EF4-FFF2-40B4-BE49-F238E27FC236}">
-                <a16:creationId xmlns:a16="http://schemas.microsoft.com/office/drawing/2014/main" id="{6AB1221F-BE82-EB33-AC5F-BFC010701BC9}"/>
-              </a:ext>
-            </a:extLst>
-          </p:cNvPr>
-          <p:cNvSpPr>
-            <a:spLocks noGrp="1"/>
-          </p:cNvSpPr>
-          <p:nvPr>
-            <p:ph type="title"/>
-          </p:nvPr>
-        </p:nvSpPr>
-        <p:spPr/>
-        <p:txBody>
-          <a:bodyPr/>
-          <a:lstStyle/>
-          <a:p>
-            <a:r>
-              <a:rPr lang="fr-FR" dirty="0"/>
-              <a:t>I2C</a:t>
-            </a:r>
-          </a:p>
-        </p:txBody>
-      </p:sp>
-      <p:sp>
-        <p:nvSpPr>
-          <p:cNvPr id="3" name="Espace réservé du contenu 2">
-            <a:extLst>
-              <a:ext uri="{FF2B5EF4-FFF2-40B4-BE49-F238E27FC236}">
-                <a16:creationId xmlns:a16="http://schemas.microsoft.com/office/drawing/2014/main" id="{39C5272C-BEA3-7C9A-67DE-638870B6F21B}"/>
-              </a:ext>
-            </a:extLst>
-          </p:cNvPr>
-          <p:cNvSpPr>
-            <a:spLocks noGrp="1"/>
-          </p:cNvSpPr>
-          <p:nvPr>
-            <p:ph idx="1"/>
-          </p:nvPr>
-        </p:nvSpPr>
-        <p:spPr/>
-        <p:txBody>
-          <a:bodyPr/>
-          <a:lstStyle/>
-          <a:p>
-            <a:r>
-              <a:rPr lang="it-IT" dirty="0"/>
-              <a:t>GPIO 21 (SDA)</a:t>
-            </a:r>
-          </a:p>
-          <a:p>
-            <a:r>
-              <a:rPr lang="it-IT" dirty="0"/>
-              <a:t>GPIO 22 (SCL)</a:t>
-            </a:r>
-            <a:endParaRPr lang="fr-FR" dirty="0"/>
-          </a:p>
-        </p:txBody>
-      </p:sp>
-    </p:spTree>
-    <p:extLst>
-      <p:ext uri="{BB962C8B-B14F-4D97-AF65-F5344CB8AC3E}">
-        <p14:creationId xmlns:p14="http://schemas.microsoft.com/office/powerpoint/2010/main" val="1655968989"/>
-      </p:ext>
-    </p:extLst>
-  </p:cSld>
-  <p:clrMapOvr>
-    <a:masterClrMapping/>
-  </p:clrMapOvr>
-</p:sld>
-</file>
-
-<file path=ppt/slides/slide15.xml><?xml version="1.0" encoding="utf-8"?>
 <p:sld xmlns:a="http://schemas.openxmlformats.org/drawingml/2006/main" xmlns:r="http://schemas.openxmlformats.org/officeDocument/2006/relationships" xmlns:p="http://schemas.openxmlformats.org/presentationml/2006/main">
   <p:cSld>
     <p:spTree>
@@ -4475,6 +4406,122 @@
 </p:sld>
 </file>
 
+<file path=ppt/slides/slide15.xml><?xml version="1.0" encoding="utf-8"?>
+<p:sld xmlns:a="http://schemas.openxmlformats.org/drawingml/2006/main" xmlns:r="http://schemas.openxmlformats.org/officeDocument/2006/relationships" xmlns:p="http://schemas.openxmlformats.org/presentationml/2006/main">
+  <p:cSld>
+    <p:spTree>
+      <p:nvGrpSpPr>
+        <p:cNvPr id="1" name=""/>
+        <p:cNvGrpSpPr/>
+        <p:nvPr/>
+      </p:nvGrpSpPr>
+      <p:grpSpPr>
+        <a:xfrm>
+          <a:off x="0" y="0"/>
+          <a:ext cx="0" cy="0"/>
+          <a:chOff x="0" y="0"/>
+          <a:chExt cx="0" cy="0"/>
+        </a:xfrm>
+      </p:grpSpPr>
+      <p:sp>
+        <p:nvSpPr>
+          <p:cNvPr id="2" name="Titre 1">
+            <a:extLst>
+              <a:ext uri="{FF2B5EF4-FFF2-40B4-BE49-F238E27FC236}">
+                <a16:creationId xmlns:a16="http://schemas.microsoft.com/office/drawing/2014/main" id="{EB761F1F-0979-0559-7A6C-F68EEE5B088A}"/>
+              </a:ext>
+            </a:extLst>
+          </p:cNvPr>
+          <p:cNvSpPr>
+            <a:spLocks noGrp="1"/>
+          </p:cNvSpPr>
+          <p:nvPr>
+            <p:ph type="title"/>
+          </p:nvPr>
+        </p:nvSpPr>
+        <p:spPr/>
+        <p:txBody>
+          <a:bodyPr/>
+          <a:lstStyle/>
+          <a:p>
+            <a:r>
+              <a:rPr lang="fr-FR" dirty="0"/>
+              <a:t>SDK</a:t>
+            </a:r>
+          </a:p>
+        </p:txBody>
+      </p:sp>
+      <p:sp>
+        <p:nvSpPr>
+          <p:cNvPr id="3" name="Espace réservé du contenu 2">
+            <a:extLst>
+              <a:ext uri="{FF2B5EF4-FFF2-40B4-BE49-F238E27FC236}">
+                <a16:creationId xmlns:a16="http://schemas.microsoft.com/office/drawing/2014/main" id="{8B3C7AA1-AF60-B92A-0AFE-793A315FDE8E}"/>
+              </a:ext>
+            </a:extLst>
+          </p:cNvPr>
+          <p:cNvSpPr>
+            <a:spLocks noGrp="1"/>
+          </p:cNvSpPr>
+          <p:nvPr>
+            <p:ph idx="1"/>
+          </p:nvPr>
+        </p:nvSpPr>
+        <p:spPr/>
+        <p:txBody>
+          <a:bodyPr/>
+          <a:lstStyle/>
+          <a:p>
+            <a:r>
+              <a:rPr lang="fr-FR" dirty="0"/>
+              <a:t>Liste des SDK compatibles</a:t>
+            </a:r>
+          </a:p>
+        </p:txBody>
+      </p:sp>
+      <p:pic>
+        <p:nvPicPr>
+          <p:cNvPr id="5" name="Image 4">
+            <a:extLst>
+              <a:ext uri="{FF2B5EF4-FFF2-40B4-BE49-F238E27FC236}">
+                <a16:creationId xmlns:a16="http://schemas.microsoft.com/office/drawing/2014/main" id="{7E69DF00-2D9A-5EBE-4506-D4B2594D4D86}"/>
+              </a:ext>
+            </a:extLst>
+          </p:cNvPr>
+          <p:cNvPicPr>
+            <a:picLocks noChangeAspect="1"/>
+          </p:cNvPicPr>
+          <p:nvPr/>
+        </p:nvPicPr>
+        <p:blipFill>
+          <a:blip r:embed="rId2"/>
+          <a:stretch>
+            <a:fillRect/>
+          </a:stretch>
+        </p:blipFill>
+        <p:spPr>
+          <a:xfrm>
+            <a:off x="0" y="2535071"/>
+            <a:ext cx="9144000" cy="1787857"/>
+          </a:xfrm>
+          <a:prstGeom prst="rect">
+            <a:avLst/>
+          </a:prstGeom>
+        </p:spPr>
+      </p:pic>
+    </p:spTree>
+    <p:extLst>
+      <p:ext uri="{BB962C8B-B14F-4D97-AF65-F5344CB8AC3E}">
+        <p14:creationId xmlns:p14="http://schemas.microsoft.com/office/powerpoint/2010/main" val="4066030915"/>
+      </p:ext>
+    </p:extLst>
+  </p:cSld>
+  <p:clrMapOvr>
+    <a:masterClrMapping/>
+  </p:clrMapOvr>
+</p:sld>
+</file>
+
 <file path=ppt/slides/slide16.xml><?xml version="1.0" encoding="utf-8"?>
 <p:sld xmlns:a="http://schemas.openxmlformats.org/drawingml/2006/main" xmlns:r="http://schemas.openxmlformats.org/officeDocument/2006/relationships" xmlns:p="http://schemas.openxmlformats.org/presentationml/2006/main">
   <p:cSld>
@@ -4536,7 +4583,12 @@
             <p:ph idx="1"/>
           </p:nvPr>
         </p:nvSpPr>
-        <p:spPr/>
+        <p:spPr>
+          <a:xfrm>
+            <a:off x="179513" y="1412776"/>
+            <a:ext cx="6408712" cy="5040560"/>
+          </a:xfrm>
+        </p:spPr>
         <p:txBody>
           <a:bodyPr/>
           <a:lstStyle/>
@@ -4549,19 +4601,23 @@
           <a:p>
             <a:pPr lvl="1"/>
             <a:r>
-              <a:rPr lang="fr-FR" dirty="0"/>
-              <a:t>En C</a:t>
+              <a:rPr lang="fr-FR" dirty="0" err="1"/>
+              <a:t>Board</a:t>
+            </a:r>
+            <a:r>
+              <a:rPr lang="fr-FR" dirty="0"/>
+              <a:t> manager</a:t>
             </a:r>
           </a:p>
           <a:p>
             <a:pPr lvl="1"/>
             <a:r>
               <a:rPr lang="fr-FR" dirty="0"/>
-              <a:t>En </a:t>
+              <a:t>ESP32 by </a:t>
             </a:r>
             <a:r>
               <a:rPr lang="fr-FR" dirty="0" err="1"/>
-              <a:t>Micropython</a:t>
+              <a:t>Espressif</a:t>
             </a:r>
             <a:endParaRPr lang="fr-FR" dirty="0"/>
           </a:p>
@@ -4569,10 +4625,10 @@
       </p:sp>
       <p:pic>
         <p:nvPicPr>
-          <p:cNvPr id="5" name="Image 4">
+          <p:cNvPr id="6" name="Image 5">
             <a:extLst>
               <a:ext uri="{FF2B5EF4-FFF2-40B4-BE49-F238E27FC236}">
-                <a16:creationId xmlns:a16="http://schemas.microsoft.com/office/drawing/2014/main" id="{8807AF39-761E-2530-423B-D048250C2F33}"/>
+                <a16:creationId xmlns:a16="http://schemas.microsoft.com/office/drawing/2014/main" id="{12CF981E-E7C7-8650-D437-8EE4BB34AB08}"/>
               </a:ext>
             </a:extLst>
           </p:cNvPr>
@@ -4589,8 +4645,8 @@
         </p:blipFill>
         <p:spPr>
           <a:xfrm>
-            <a:off x="2771800" y="3068960"/>
-            <a:ext cx="2829320" cy="2953162"/>
+            <a:off x="6588224" y="1317868"/>
+            <a:ext cx="2724530" cy="5544324"/>
           </a:xfrm>
           <a:prstGeom prst="rect">
             <a:avLst/>
@@ -4676,16 +4732,27 @@
           <a:bodyPr/>
           <a:lstStyle/>
           <a:p>
-            <a:endParaRPr lang="fr-FR"/>
+            <a:r>
+              <a:rPr lang="fr-FR" dirty="0"/>
+              <a:t>Le </a:t>
+            </a:r>
+            <a:r>
+              <a:rPr lang="fr-FR" dirty="0" err="1"/>
+              <a:t>SoC</a:t>
+            </a:r>
+            <a:r>
+              <a:rPr lang="fr-FR" dirty="0"/>
+              <a:t> utilisé pendant la formation est le ESP32-WROOM-DA-Module</a:t>
+            </a:r>
           </a:p>
         </p:txBody>
       </p:sp>
       <p:pic>
         <p:nvPicPr>
-          <p:cNvPr id="5" name="Image 4">
+          <p:cNvPr id="6" name="Image 5">
             <a:extLst>
               <a:ext uri="{FF2B5EF4-FFF2-40B4-BE49-F238E27FC236}">
-                <a16:creationId xmlns:a16="http://schemas.microsoft.com/office/drawing/2014/main" id="{4B101E80-7A74-B975-0C6A-67CD2A525360}"/>
+                <a16:creationId xmlns:a16="http://schemas.microsoft.com/office/drawing/2014/main" id="{5F6D809B-03B8-EF58-4287-E515A580AB4A}"/>
               </a:ext>
             </a:extLst>
           </p:cNvPr>
@@ -4702,8 +4769,8 @@
         </p:blipFill>
         <p:spPr>
           <a:xfrm>
-            <a:off x="0" y="2018849"/>
-            <a:ext cx="9144000" cy="2820302"/>
+            <a:off x="1259632" y="2386433"/>
+            <a:ext cx="6264696" cy="4471567"/>
           </a:xfrm>
           <a:prstGeom prst="rect">
             <a:avLst/>
